--- a/ppt phase 1.pptx
+++ b/ppt phase 1.pptx
@@ -16182,7 +16182,7 @@
           <a:p>
             <a:fld id="{846CE7D5-CF57-46EF-B807-FDD0502418D4}" type="datetimeFigureOut">
               <a:rPr lang="en-GB" smtClean="0"/>
-              <a:t>11/09/2026</a:t>
+              <a:t>13/09/2026</a:t>
             </a:fld>
             <a:endParaRPr lang="en-GB"/>
           </a:p>
@@ -16352,7 +16352,7 @@
           <a:p>
             <a:fld id="{846CE7D5-CF57-46EF-B807-FDD0502418D4}" type="datetimeFigureOut">
               <a:rPr lang="en-GB" smtClean="0"/>
-              <a:t>11/09/2026</a:t>
+              <a:t>13/09/2026</a:t>
             </a:fld>
             <a:endParaRPr lang="en-GB"/>
           </a:p>
@@ -16532,7 +16532,7 @@
           <a:p>
             <a:fld id="{846CE7D5-CF57-46EF-B807-FDD0502418D4}" type="datetimeFigureOut">
               <a:rPr lang="en-GB" smtClean="0"/>
-              <a:t>11/09/2026</a:t>
+              <a:t>13/09/2026</a:t>
             </a:fld>
             <a:endParaRPr lang="en-GB"/>
           </a:p>
@@ -16702,7 +16702,7 @@
           <a:p>
             <a:fld id="{846CE7D5-CF57-46EF-B807-FDD0502418D4}" type="datetimeFigureOut">
               <a:rPr lang="en-GB" smtClean="0"/>
-              <a:t>11/09/2026</a:t>
+              <a:t>13/09/2026</a:t>
             </a:fld>
             <a:endParaRPr lang="en-GB"/>
           </a:p>
@@ -16948,7 +16948,7 @@
           <a:p>
             <a:fld id="{846CE7D5-CF57-46EF-B807-FDD0502418D4}" type="datetimeFigureOut">
               <a:rPr lang="en-GB" smtClean="0"/>
-              <a:t>11/09/2026</a:t>
+              <a:t>13/09/2026</a:t>
             </a:fld>
             <a:endParaRPr lang="en-GB"/>
           </a:p>
@@ -17180,7 +17180,7 @@
           <a:p>
             <a:fld id="{846CE7D5-CF57-46EF-B807-FDD0502418D4}" type="datetimeFigureOut">
               <a:rPr lang="en-GB" smtClean="0"/>
-              <a:t>11/09/2026</a:t>
+              <a:t>13/09/2026</a:t>
             </a:fld>
             <a:endParaRPr lang="en-GB"/>
           </a:p>
@@ -17547,7 +17547,7 @@
           <a:p>
             <a:fld id="{846CE7D5-CF57-46EF-B807-FDD0502418D4}" type="datetimeFigureOut">
               <a:rPr lang="en-GB" smtClean="0"/>
-              <a:t>11/09/2026</a:t>
+              <a:t>13/09/2026</a:t>
             </a:fld>
             <a:endParaRPr lang="en-GB"/>
           </a:p>
@@ -17665,7 +17665,7 @@
           <a:p>
             <a:fld id="{846CE7D5-CF57-46EF-B807-FDD0502418D4}" type="datetimeFigureOut">
               <a:rPr lang="en-GB" smtClean="0"/>
-              <a:t>11/09/2026</a:t>
+              <a:t>13/09/2026</a:t>
             </a:fld>
             <a:endParaRPr lang="en-GB"/>
           </a:p>
@@ -17760,7 +17760,7 @@
           <a:p>
             <a:fld id="{846CE7D5-CF57-46EF-B807-FDD0502418D4}" type="datetimeFigureOut">
               <a:rPr lang="en-GB" smtClean="0"/>
-              <a:t>11/09/2026</a:t>
+              <a:t>13/09/2026</a:t>
             </a:fld>
             <a:endParaRPr lang="en-GB"/>
           </a:p>
@@ -18037,7 +18037,7 @@
           <a:p>
             <a:fld id="{846CE7D5-CF57-46EF-B807-FDD0502418D4}" type="datetimeFigureOut">
               <a:rPr lang="en-GB" smtClean="0"/>
-              <a:t>11/09/2026</a:t>
+              <a:t>13/09/2026</a:t>
             </a:fld>
             <a:endParaRPr lang="en-GB"/>
           </a:p>
@@ -18290,7 +18290,7 @@
           <a:p>
             <a:fld id="{846CE7D5-CF57-46EF-B807-FDD0502418D4}" type="datetimeFigureOut">
               <a:rPr lang="en-GB" smtClean="0"/>
-              <a:t>11/09/2026</a:t>
+              <a:t>13/09/2026</a:t>
             </a:fld>
             <a:endParaRPr lang="en-GB"/>
           </a:p>
@@ -18503,7 +18503,7 @@
           <a:p>
             <a:fld id="{846CE7D5-CF57-46EF-B807-FDD0502418D4}" type="datetimeFigureOut">
               <a:rPr lang="en-GB" smtClean="0"/>
-              <a:t>11/09/2026</a:t>
+              <a:t>13/09/2026</a:t>
             </a:fld>
             <a:endParaRPr lang="en-GB"/>
           </a:p>
@@ -20431,22 +20431,15 @@
           <a:lstStyle/>
           <a:p>
             <a:r>
-              <a:rPr lang="en-GB" sz="1800">
+              <a:rPr lang="en-GB" sz="1800" dirty="0">
                 <a:solidFill>
                   <a:schemeClr val="tx2"/>
                 </a:solidFill>
                 <a:ea typeface="+mn-lt"/>
                 <a:cs typeface="+mn-lt"/>
               </a:rPr>
-              <a:t>Array, Structure, Linked List, Searching, Sorting, SQlite—Nisha Rana</a:t>
+              <a:t>Array, Structure, Linked List, Searching, Sorting</a:t>
             </a:r>
-            <a:endParaRPr lang="en-GB" sz="1800">
-              <a:solidFill>
-                <a:schemeClr val="tx2"/>
-              </a:solidFill>
-            </a:endParaRPr>
-          </a:p>
-          <a:p>
             <a:r>
               <a:rPr lang="en-GB" sz="1800">
                 <a:solidFill>
@@ -20455,9 +20448,19 @@
                 <a:ea typeface="+mn-lt"/>
                 <a:cs typeface="+mn-lt"/>
               </a:rPr>
-              <a:t>Queue, Priority Queue, Stack,HTML/CSS/JS- Samriddhi Gaur</a:t>
+              <a:t>, Flask—</a:t>
             </a:r>
-            <a:endParaRPr lang="en-GB" sz="1800">
+            <a:r>
+              <a:rPr lang="en-GB" sz="1800" dirty="0">
+                <a:solidFill>
+                  <a:schemeClr val="tx2"/>
+                </a:solidFill>
+                <a:ea typeface="+mn-lt"/>
+                <a:cs typeface="+mn-lt"/>
+              </a:rPr>
+              <a:t>Nisha Rana</a:t>
+            </a:r>
+            <a:endParaRPr lang="en-GB" sz="1800" dirty="0">
               <a:solidFill>
                 <a:schemeClr val="tx2"/>
               </a:solidFill>
@@ -20465,37 +20468,94 @@
           </a:p>
           <a:p>
             <a:r>
-              <a:rPr lang="en-GB" sz="1800">
+              <a:rPr lang="en-GB" sz="1800" dirty="0">
                 <a:solidFill>
                   <a:schemeClr val="tx2"/>
                 </a:solidFill>
                 <a:ea typeface="+mn-lt"/>
                 <a:cs typeface="+mn-lt"/>
               </a:rPr>
-              <a:t>Graph, BFS, DFS,Flask-Bhavya Sharma</a:t>
+              <a:t>Queue, Priority Queue, </a:t>
             </a:r>
-            <a:endParaRPr lang="en-GB" sz="1800">
+            <a:r>
+              <a:rPr lang="en-GB" sz="1800" dirty="0" err="1">
+                <a:solidFill>
+                  <a:schemeClr val="tx2"/>
+                </a:solidFill>
+                <a:ea typeface="+mn-lt"/>
+                <a:cs typeface="+mn-lt"/>
+              </a:rPr>
+              <a:t>Stack,HTML</a:t>
+            </a:r>
+            <a:r>
+              <a:rPr lang="en-GB" sz="1800" dirty="0">
+                <a:solidFill>
+                  <a:schemeClr val="tx2"/>
+                </a:solidFill>
+                <a:ea typeface="+mn-lt"/>
+                <a:cs typeface="+mn-lt"/>
+              </a:rPr>
+              <a:t>/CSS/JS- Samriddhi Gaur</a:t>
+            </a:r>
+            <a:endParaRPr lang="en-GB" sz="1800" dirty="0">
               <a:solidFill>
                 <a:schemeClr val="tx2"/>
               </a:solidFill>
             </a:endParaRPr>
           </a:p>
           <a:p>
-            <a:endParaRPr lang="en-GB" sz="1800">
+            <a:r>
+              <a:rPr lang="en-GB" sz="1800" dirty="0">
+                <a:solidFill>
+                  <a:schemeClr val="tx2"/>
+                </a:solidFill>
+                <a:ea typeface="+mn-lt"/>
+                <a:cs typeface="+mn-lt"/>
+              </a:rPr>
+              <a:t>Graph, BFS, DFS, </a:t>
+            </a:r>
+            <a:r>
+              <a:rPr lang="en-GB" sz="1800" dirty="0" err="1">
+                <a:solidFill>
+                  <a:schemeClr val="tx2"/>
+                </a:solidFill>
+                <a:ea typeface="+mn-lt"/>
+                <a:cs typeface="+mn-lt"/>
+              </a:rPr>
+              <a:t>SQlite</a:t>
+            </a:r>
+            <a:r>
+              <a:rPr lang="en-GB" sz="1800" dirty="0">
+                <a:solidFill>
+                  <a:schemeClr val="tx2"/>
+                </a:solidFill>
+                <a:ea typeface="+mn-lt"/>
+                <a:cs typeface="+mn-lt"/>
+              </a:rPr>
+              <a:t>-Bhavya Sharma</a:t>
+            </a:r>
+            <a:endParaRPr lang="en-GB" sz="1800" dirty="0">
               <a:solidFill>
                 <a:schemeClr val="tx2"/>
               </a:solidFill>
             </a:endParaRPr>
           </a:p>
           <a:p>
-            <a:endParaRPr lang="en-GB" sz="1800">
+            <a:endParaRPr lang="en-GB" sz="1800" dirty="0">
               <a:solidFill>
                 <a:schemeClr val="tx2"/>
               </a:solidFill>
             </a:endParaRPr>
           </a:p>
           <a:p>
-            <a:endParaRPr lang="en-GB" sz="1800">
+            <a:endParaRPr lang="en-GB" sz="1800" dirty="0">
+              <a:solidFill>
+                <a:schemeClr val="tx2"/>
+              </a:solidFill>
+            </a:endParaRPr>
+          </a:p>
+          <a:p>
+            <a:endParaRPr lang="en-GB" sz="1800" dirty="0">
               <a:solidFill>
                 <a:schemeClr val="tx2"/>
               </a:solidFill>
